--- a/assets/powerpoints/module-meteo/A1-monte-t-on-sur-le-toit-demain.pptx
+++ b/assets/powerpoints/module-meteo/A1-monte-t-on-sur-le-toit-demain.pptx
@@ -4720,7 +4720,7 @@
                 </a:solidFill>
                 <a:latin typeface="Verdana"/>
               </a:rPr>
-              <a:t>SÉANCE A1  ·  MODULE 6</a:t>
+              <a:t>SÉANCE A1  ·  MODULE 7</a:t>
             </a:r>
           </a:p>
         </p:txBody>
